--- a/public/fun/pack/pptx/weddingpro/결혼식프리미엄_03_식순중심_세이지크림.pptx
+++ b/public/fun/pack/pptx/weddingpro/결혼식프리미엄_03_식순중심_세이지크림.pptx
@@ -113,12 +113,12 @@
   <p:extLst>
     <p:ext uri="{521415D9-36F7-43E2-AB2F-B90AF26B5E84}">
       <p14:sectionLst xmlns:p14="http://schemas.microsoft.com/office/powerpoint/2010/main">
-        <p14:section name="시작" id="{0F0F9706-C6AC-44FD-A498-3B57D1B9F28C}">
+        <p14:section name="시작" id="{3260CDF9-35A9-4496-B59A-CE1B540000DC}">
           <p14:sldIdLst>
             <p14:sldId id="256"/>
           </p14:sldIdLst>
         </p14:section>
-        <p14:section name="본문" id="{F516063D-73C8-4ED8-AFFD-1386E3A1B465}">
+        <p14:section name="본문" id="{CA00502A-3BC9-4816-90C9-A6B2044A22AC}">
           <p14:sldIdLst>
             <p14:sldId id="257"/>
             <p14:sldId id="258"/>
@@ -127,7 +127,7 @@
             <p14:sldId id="261"/>
           </p14:sldIdLst>
         </p14:section>
-        <p14:section name="마무리" id="{A001D53A-C5B2-40C4-A806-ED219841253C}">
+        <p14:section name="마무리" id="{FF5C2F52-3D50-422B-A104-D343880BB566}">
           <p14:sldIdLst>
             <p14:sldId id="262"/>
           </p14:sldIdLst>
@@ -1390,7 +1390,7 @@
             </a:lvl1pPr>
           </a:lstStyle>
           <a:p>
-            <a:fld id="{569F4A45-088F-476F-848E-668250B6F71C}" type="slidenum">
+            <a:fld id="{3024A977-14A7-48AB-81F1-F519B5AB9D6C}" type="slidenum">
               <a:rPr lang="en-US"/>
               <a:t>‹#›</a:t>
             </a:fld>
@@ -1971,7 +1971,7 @@
             </a:lvl1pPr>
           </a:lstStyle>
           <a:p>
-            <a:fld id="{203E4493-48F8-44B9-B454-0FDCA22F26F2}" type="slidenum">
+            <a:fld id="{2DB14964-8E1D-4602-A000-5242FE542C7A}" type="slidenum">
               <a:rPr lang="en-US"/>
               <a:t>‹#›</a:t>
             </a:fld>
@@ -2659,7 +2659,7 @@
             </a:lvl1pPr>
           </a:lstStyle>
           <a:p>
-            <a:fld id="{2EB2B72E-76AE-4386-9195-D342A20F3719}" type="slidenum">
+            <a:fld id="{B738C687-20B5-4118-ABE3-DC7EE0BFFBCF}" type="slidenum">
               <a:rPr lang="en-US"/>
               <a:t>‹#›</a:t>
             </a:fld>
@@ -3576,7 +3576,7 @@
           <a:p>
             <a:r>
               <a:rPr lang="ko-KR"/>
-              <a:t>0000. 00. 00 · 예식장 이름</a:t>
+              <a:t>날짜 입력 · 예식장 이름</a:t>
             </a:r>
           </a:p>
         </p:txBody>
@@ -3799,7 +3799,7 @@
           <a:bodyPr/>
           <a:lstStyle/>
           <a:p>
-            <a:fld id="{E52F04BE-09CC-4B43-9C50-DF8AE44F8A2E}" type="slidenum">
+            <a:fld id="{F74362D0-43DF-4F54-9AA6-469B7F9AB5DD}" type="slidenum">
               <a:rPr lang="en-US"/>
               <a:t>‹#›</a:t>
             </a:fld>
@@ -4251,7 +4251,7 @@
           <a:bodyPr/>
           <a:lstStyle/>
           <a:p>
-            <a:fld id="{E97936CA-AC8F-4FF8-B976-9650B69BC892}" type="slidenum">
+            <a:fld id="{547CE116-99CF-48F4-8CDB-FA0474F593F6}" type="slidenum">
               <a:rPr lang="en-US"/>
               <a:t>‹#›</a:t>
             </a:fld>
@@ -5080,7 +5080,7 @@
           <a:bodyPr/>
           <a:lstStyle/>
           <a:p>
-            <a:fld id="{C68756A3-F1EC-47FB-BB8D-480DAAEC649A}" type="slidenum">
+            <a:fld id="{D8FBBD85-930D-4C88-B38C-8DFA0B7CEBA3}" type="slidenum">
               <a:rPr lang="en-US"/>
               <a:t>‹#›</a:t>
             </a:fld>
@@ -6428,7 +6428,7 @@
           <a:bodyPr/>
           <a:lstStyle/>
           <a:p>
-            <a:fld id="{FE3E209E-E406-4E92-B501-6BF6AAE11710}" type="slidenum">
+            <a:fld id="{861CAFAE-136D-4E79-938C-650483C74174}" type="slidenum">
               <a:rPr lang="en-US"/>
               <a:t>‹#›</a:t>
             </a:fld>
@@ -6516,7 +6516,7 @@
           <a:bodyPr/>
           <a:lstStyle/>
           <a:p>
-            <a:fld id="{2DB4736E-090B-4834-9DEC-D6B04E95EECC}" type="slidenum">
+            <a:fld id="{B0A8FEE1-31AB-468C-8010-21E21EACA9A5}" type="slidenum">
               <a:rPr lang="en-US"/>
               <a:t>‹#›</a:t>
             </a:fld>
